--- a/lab_01-git/material/terminal_primer.pptx
+++ b/lab_01-git/material/terminal_primer.pptx
@@ -213,7 +213,7 @@
           <a:p>
             <a:fld id="{81C4B3FE-0320-8142-8396-5C3025C019EC}" type="datetimeFigureOut">
               <a:rPr lang="en-IT" smtClean="0"/>
-              <a:t>2/11/25</a:t>
+              <a:t>2/4/26</a:t>
             </a:fld>
             <a:endParaRPr lang="en-IT"/>
           </a:p>
@@ -1550,7 +1550,7 @@
               <a:rPr lang="it-IT" sz="2800" dirty="0">
                 <a:latin typeface="Aptos" panose="020B0004020202020204" pitchFamily="34" charset="0"/>
               </a:rPr>
-              <a:t>A.Y. 2024-2025</a:t>
+              <a:t>A.Y. 2025-2026</a:t>
             </a:r>
           </a:p>
         </p:txBody>
